--- a/docs/project/slides/GreenSM-Pitch-10min.pptx
+++ b/docs/project/slides/GreenSM-Pitch-10min.pptx
@@ -5363,7 +5363,7 @@
           <a:p>
             <a:pPr algn="ctr"/>
             <a:r>
-              <a:rPr sz="1700" b="1">
+              <a:rPr sz="1500" b="1">
                 <a:solidFill>
                   <a:srgbClr val="FFFFFF"/>
                 </a:solidFill>
